--- a/example/example.pptx
+++ b/example/example.pptx
@@ -109,6 +109,11 @@
       </a:defRPr>
     </a:lvl9pPr>
   </p:defaultTextStyle>
+  <p:extLst>
+    <p:ext uri="{EFAFB233-063F-42B5-8137-9DF3F51BA10A}">
+      <p15:sldGuideLst xmlns:p15="http://schemas.microsoft.com/office/powerpoint/2012/main"/>
+    </p:ext>
+  </p:extLst>
 </p:presentation>
 </file>
 
@@ -194,7 +199,7 @@
           <a:p>
             <a:fld id="{02A9C2D5-8DF8-4FAE-95FA-381D99844E59}" type="datetimeFigureOut">
               <a:rPr lang="zh-CN" altLang="en-US" smtClean="0"/>
-              <a:t>2023/10/19</a:t>
+              <a:t>2026/10/12</a:t>
             </a:fld>
             <a:endParaRPr lang="zh-CN" altLang="en-US"/>
           </a:p>
@@ -1022,6 +1027,54 @@
               </a:rPr>
               <a:t>支持检查更新●</a:t>
             </a:r>
+            <a:endParaRPr lang="en-US" altLang="zh-CN" dirty="0">
+              <a:solidFill>
+                <a:srgbClr val="BCBEC4"/>
+              </a:solidFill>
+              <a:effectLst/>
+              <a:latin typeface="宋体" panose="02010600030101010101" pitchFamily="2" charset="-122"/>
+              <a:ea typeface="宋体" panose="02010600030101010101" pitchFamily="2" charset="-122"/>
+            </a:endParaRPr>
+          </a:p>
+          <a:p>
+            <a:r>
+              <a:rPr lang="zh-CN" altLang="en-US" dirty="0">
+                <a:solidFill>
+                  <a:srgbClr val="BCBEC4"/>
+                </a:solidFill>
+                <a:effectLst/>
+              </a:rPr>
+              <a:t>更多</a:t>
+            </a:r>
+            <a:r>
+              <a:rPr lang="zh-CN" altLang="en-US">
+                <a:solidFill>
+                  <a:srgbClr val="BCBEC4"/>
+                </a:solidFill>
+                <a:effectLst/>
+              </a:rPr>
+              <a:t>更新功能，请</a:t>
+            </a:r>
+            <a:r>
+              <a:rPr lang="zh-CN" altLang="en-US" dirty="0">
+                <a:solidFill>
+                  <a:srgbClr val="BCBEC4"/>
+                </a:solidFill>
+                <a:effectLst/>
+              </a:rPr>
+              <a:t>查看项目主页。</a:t>
+            </a:r>
+            <a:r>
+              <a:rPr lang="zh-CN" altLang="en-US" dirty="0">
+                <a:solidFill>
+                  <a:srgbClr val="BCBEC4"/>
+                </a:solidFill>
+                <a:effectLst/>
+                <a:latin typeface="宋体" panose="02010600030101010101" pitchFamily="2" charset="-122"/>
+                <a:ea typeface="宋体" panose="02010600030101010101" pitchFamily="2" charset="-122"/>
+              </a:rPr>
+              <a:t>●</a:t>
+            </a:r>
             <a:endParaRPr lang="zh-CN" altLang="en-US" dirty="0">
               <a:solidFill>
                 <a:srgbClr val="BCBEC4"/>
@@ -1135,10 +1188,9 @@
           </a:p>
           <a:p>
             <a:r>
-              <a:rPr lang="zh-CN" altLang="en-US"/>
+              <a:rPr lang="zh-CN" altLang="en-US" dirty="0"/>
               <a:t>预祝您生活愉快。</a:t>
             </a:r>
-            <a:endParaRPr lang="zh-CN" altLang="en-US" dirty="0"/>
           </a:p>
         </p:txBody>
       </p:sp>
@@ -1346,7 +1398,7 @@
           <a:p>
             <a:fld id="{4164A0BD-F726-4652-96CA-017D7FEF2292}" type="datetimeFigureOut">
               <a:rPr lang="zh-CN" altLang="en-US" smtClean="0"/>
-              <a:t>2023/10/19</a:t>
+              <a:t>2026/10/12</a:t>
             </a:fld>
             <a:endParaRPr lang="zh-CN" altLang="en-US"/>
           </a:p>
@@ -1462,13 +1514,13 @@
   <p:clrMapOvr>
     <a:overrideClrMapping bg1="dk1" tx1="lt1" bg2="dk2" tx2="lt2" accent1="accent1" accent2="accent2" accent3="accent3" accent4="accent4" accent5="accent5" accent6="accent6" hlink="hlink" folHlink="folHlink"/>
   </p:clrMapOvr>
-  <mc:AlternateContent xmlns:mc="http://schemas.openxmlformats.org/markup-compatibility/2006">
-    <mc:Choice xmlns:p159="http://schemas.microsoft.com/office/powerpoint/2015/09/main" Requires="p159">
+  <mc:AlternateContent xmlns:mc="http://schemas.openxmlformats.org/markup-compatibility/2006" xmlns:p159="http://schemas.microsoft.com/office/powerpoint/2015/09/main">
+    <mc:Choice Requires="p159">
       <p:transition spd="med">
         <p159:morph option="byObject"/>
       </p:transition>
     </mc:Choice>
-    <mc:Fallback>
+    <mc:Fallback xmlns="">
       <p:transition spd="med">
         <p:fade/>
       </p:transition>
@@ -1586,7 +1638,7 @@
           <a:p>
             <a:fld id="{4164A0BD-F726-4652-96CA-017D7FEF2292}" type="datetimeFigureOut">
               <a:rPr lang="zh-CN" altLang="en-US" smtClean="0"/>
-              <a:t>2023/10/19</a:t>
+              <a:t>2026/10/12</a:t>
             </a:fld>
             <a:endParaRPr lang="zh-CN" altLang="en-US"/>
           </a:p>
@@ -1644,13 +1696,13 @@
   <p:clrMapOvr>
     <a:masterClrMapping/>
   </p:clrMapOvr>
-  <mc:AlternateContent xmlns:mc="http://schemas.openxmlformats.org/markup-compatibility/2006">
-    <mc:Choice xmlns:p159="http://schemas.microsoft.com/office/powerpoint/2015/09/main" Requires="p159">
+  <mc:AlternateContent xmlns:mc="http://schemas.openxmlformats.org/markup-compatibility/2006" xmlns:p159="http://schemas.microsoft.com/office/powerpoint/2015/09/main">
+    <mc:Choice Requires="p159">
       <p:transition spd="med">
         <p159:morph option="byObject"/>
       </p:transition>
     </mc:Choice>
-    <mc:Fallback>
+    <mc:Fallback xmlns="">
       <p:transition spd="med">
         <p:fade/>
       </p:transition>
@@ -1778,7 +1830,7 @@
           <a:p>
             <a:fld id="{4164A0BD-F726-4652-96CA-017D7FEF2292}" type="datetimeFigureOut">
               <a:rPr lang="zh-CN" altLang="en-US" smtClean="0"/>
-              <a:t>2023/10/19</a:t>
+              <a:t>2026/10/12</a:t>
             </a:fld>
             <a:endParaRPr lang="zh-CN" altLang="en-US"/>
           </a:p>
@@ -1836,13 +1888,13 @@
   <p:clrMapOvr>
     <a:masterClrMapping/>
   </p:clrMapOvr>
-  <mc:AlternateContent xmlns:mc="http://schemas.openxmlformats.org/markup-compatibility/2006">
-    <mc:Choice xmlns:p159="http://schemas.microsoft.com/office/powerpoint/2015/09/main" Requires="p159">
+  <mc:AlternateContent xmlns:mc="http://schemas.openxmlformats.org/markup-compatibility/2006" xmlns:p159="http://schemas.microsoft.com/office/powerpoint/2015/09/main">
+    <mc:Choice Requires="p159">
       <p:transition spd="med">
         <p159:morph option="byObject"/>
       </p:transition>
     </mc:Choice>
-    <mc:Fallback>
+    <mc:Fallback xmlns="">
       <p:transition spd="med">
         <p:fade/>
       </p:transition>
@@ -1960,7 +2012,7 @@
           <a:p>
             <a:fld id="{4164A0BD-F726-4652-96CA-017D7FEF2292}" type="datetimeFigureOut">
               <a:rPr lang="zh-CN" altLang="en-US" smtClean="0"/>
-              <a:t>2023/10/19</a:t>
+              <a:t>2026/10/12</a:t>
             </a:fld>
             <a:endParaRPr lang="zh-CN" altLang="en-US"/>
           </a:p>
@@ -2018,13 +2070,13 @@
   <p:clrMapOvr>
     <a:masterClrMapping/>
   </p:clrMapOvr>
-  <mc:AlternateContent xmlns:mc="http://schemas.openxmlformats.org/markup-compatibility/2006">
-    <mc:Choice xmlns:p159="http://schemas.microsoft.com/office/powerpoint/2015/09/main" Requires="p159">
+  <mc:AlternateContent xmlns:mc="http://schemas.openxmlformats.org/markup-compatibility/2006" xmlns:p159="http://schemas.microsoft.com/office/powerpoint/2015/09/main">
+    <mc:Choice Requires="p159">
       <p:transition spd="med">
         <p159:morph option="byObject"/>
       </p:transition>
     </mc:Choice>
-    <mc:Fallback>
+    <mc:Fallback xmlns="">
       <p:transition spd="med">
         <p:fade/>
       </p:transition>
@@ -2226,7 +2278,7 @@
           <a:p>
             <a:fld id="{4164A0BD-F726-4652-96CA-017D7FEF2292}" type="datetimeFigureOut">
               <a:rPr lang="zh-CN" altLang="en-US" smtClean="0"/>
-              <a:t>2023/10/19</a:t>
+              <a:t>2026/10/12</a:t>
             </a:fld>
             <a:endParaRPr lang="zh-CN" altLang="en-US"/>
           </a:p>
@@ -2322,13 +2374,13 @@
   <p:clrMapOvr>
     <a:masterClrMapping/>
   </p:clrMapOvr>
-  <mc:AlternateContent xmlns:mc="http://schemas.openxmlformats.org/markup-compatibility/2006">
-    <mc:Choice xmlns:p159="http://schemas.microsoft.com/office/powerpoint/2015/09/main" Requires="p159">
+  <mc:AlternateContent xmlns:mc="http://schemas.openxmlformats.org/markup-compatibility/2006" xmlns:p159="http://schemas.microsoft.com/office/powerpoint/2015/09/main">
+    <mc:Choice Requires="p159">
       <p:transition spd="med">
         <p159:morph option="byObject"/>
       </p:transition>
     </mc:Choice>
-    <mc:Fallback>
+    <mc:Fallback xmlns="">
       <p:transition spd="med">
         <p:fade/>
       </p:transition>
@@ -2564,7 +2616,7 @@
           <a:p>
             <a:fld id="{4164A0BD-F726-4652-96CA-017D7FEF2292}" type="datetimeFigureOut">
               <a:rPr lang="zh-CN" altLang="en-US" smtClean="0"/>
-              <a:t>2023/10/19</a:t>
+              <a:t>2026/10/12</a:t>
             </a:fld>
             <a:endParaRPr lang="zh-CN" altLang="en-US"/>
           </a:p>
@@ -2622,13 +2674,13 @@
   <p:clrMapOvr>
     <a:masterClrMapping/>
   </p:clrMapOvr>
-  <mc:AlternateContent xmlns:mc="http://schemas.openxmlformats.org/markup-compatibility/2006">
-    <mc:Choice xmlns:p159="http://schemas.microsoft.com/office/powerpoint/2015/09/main" Requires="p159">
+  <mc:AlternateContent xmlns:mc="http://schemas.openxmlformats.org/markup-compatibility/2006" xmlns:p159="http://schemas.microsoft.com/office/powerpoint/2015/09/main">
+    <mc:Choice Requires="p159">
       <p:transition spd="med">
         <p159:morph option="byObject"/>
       </p:transition>
     </mc:Choice>
-    <mc:Fallback>
+    <mc:Fallback xmlns="">
       <p:transition spd="med">
         <p:fade/>
       </p:transition>
@@ -3027,7 +3079,7 @@
           <a:p>
             <a:fld id="{4164A0BD-F726-4652-96CA-017D7FEF2292}" type="datetimeFigureOut">
               <a:rPr lang="zh-CN" altLang="en-US" smtClean="0"/>
-              <a:t>2023/10/19</a:t>
+              <a:t>2026/10/12</a:t>
             </a:fld>
             <a:endParaRPr lang="zh-CN" altLang="en-US"/>
           </a:p>
@@ -3085,13 +3137,13 @@
   <p:clrMapOvr>
     <a:masterClrMapping/>
   </p:clrMapOvr>
-  <mc:AlternateContent xmlns:mc="http://schemas.openxmlformats.org/markup-compatibility/2006">
-    <mc:Choice xmlns:p159="http://schemas.microsoft.com/office/powerpoint/2015/09/main" Requires="p159">
+  <mc:AlternateContent xmlns:mc="http://schemas.openxmlformats.org/markup-compatibility/2006" xmlns:p159="http://schemas.microsoft.com/office/powerpoint/2015/09/main">
+    <mc:Choice Requires="p159">
       <p:transition spd="med">
         <p159:morph option="byObject"/>
       </p:transition>
     </mc:Choice>
-    <mc:Fallback>
+    <mc:Fallback xmlns="">
       <p:transition spd="med">
         <p:fade/>
       </p:transition>
@@ -3157,7 +3209,7 @@
           <a:p>
             <a:fld id="{4164A0BD-F726-4652-96CA-017D7FEF2292}" type="datetimeFigureOut">
               <a:rPr lang="zh-CN" altLang="en-US" smtClean="0"/>
-              <a:t>2023/10/19</a:t>
+              <a:t>2026/10/12</a:t>
             </a:fld>
             <a:endParaRPr lang="zh-CN" altLang="en-US"/>
           </a:p>
@@ -3215,13 +3267,13 @@
   <p:clrMapOvr>
     <a:masterClrMapping/>
   </p:clrMapOvr>
-  <mc:AlternateContent xmlns:mc="http://schemas.openxmlformats.org/markup-compatibility/2006">
-    <mc:Choice xmlns:p159="http://schemas.microsoft.com/office/powerpoint/2015/09/main" Requires="p159">
+  <mc:AlternateContent xmlns:mc="http://schemas.openxmlformats.org/markup-compatibility/2006" xmlns:p159="http://schemas.microsoft.com/office/powerpoint/2015/09/main">
+    <mc:Choice Requires="p159">
       <p:transition spd="med">
         <p159:morph option="byObject"/>
       </p:transition>
     </mc:Choice>
-    <mc:Fallback>
+    <mc:Fallback xmlns="">
       <p:transition spd="med">
         <p:fade/>
       </p:transition>
@@ -3264,7 +3316,7 @@
           <a:p>
             <a:fld id="{4164A0BD-F726-4652-96CA-017D7FEF2292}" type="datetimeFigureOut">
               <a:rPr lang="zh-CN" altLang="en-US" smtClean="0"/>
-              <a:t>2023/10/19</a:t>
+              <a:t>2026/10/12</a:t>
             </a:fld>
             <a:endParaRPr lang="zh-CN" altLang="en-US"/>
           </a:p>
@@ -3322,13 +3374,13 @@
   <p:clrMapOvr>
     <a:masterClrMapping/>
   </p:clrMapOvr>
-  <mc:AlternateContent xmlns:mc="http://schemas.openxmlformats.org/markup-compatibility/2006">
-    <mc:Choice xmlns:p159="http://schemas.microsoft.com/office/powerpoint/2015/09/main" Requires="p159">
+  <mc:AlternateContent xmlns:mc="http://schemas.openxmlformats.org/markup-compatibility/2006" xmlns:p159="http://schemas.microsoft.com/office/powerpoint/2015/09/main">
+    <mc:Choice Requires="p159">
       <p:transition spd="med">
         <p159:morph option="byObject"/>
       </p:transition>
     </mc:Choice>
-    <mc:Fallback>
+    <mc:Fallback xmlns="">
       <p:transition spd="med">
         <p:fade/>
       </p:transition>
@@ -3563,7 +3615,7 @@
           <a:p>
             <a:fld id="{4164A0BD-F726-4652-96CA-017D7FEF2292}" type="datetimeFigureOut">
               <a:rPr lang="zh-CN" altLang="en-US" smtClean="0"/>
-              <a:t>2023/10/19</a:t>
+              <a:t>2026/10/12</a:t>
             </a:fld>
             <a:endParaRPr lang="zh-CN" altLang="en-US"/>
           </a:p>
@@ -3621,13 +3673,13 @@
   <p:clrMapOvr>
     <a:masterClrMapping/>
   </p:clrMapOvr>
-  <mc:AlternateContent xmlns:mc="http://schemas.openxmlformats.org/markup-compatibility/2006">
-    <mc:Choice xmlns:p159="http://schemas.microsoft.com/office/powerpoint/2015/09/main" Requires="p159">
+  <mc:AlternateContent xmlns:mc="http://schemas.openxmlformats.org/markup-compatibility/2006" xmlns:p159="http://schemas.microsoft.com/office/powerpoint/2015/09/main">
+    <mc:Choice Requires="p159">
       <p:transition spd="med">
         <p159:morph option="byObject"/>
       </p:transition>
     </mc:Choice>
-    <mc:Fallback>
+    <mc:Fallback xmlns="">
       <p:transition spd="med">
         <p:fade/>
       </p:transition>
@@ -3897,7 +3949,7 @@
           <a:p>
             <a:fld id="{4164A0BD-F726-4652-96CA-017D7FEF2292}" type="datetimeFigureOut">
               <a:rPr lang="zh-CN" altLang="en-US" smtClean="0"/>
-              <a:t>2023/10/19</a:t>
+              <a:t>2026/10/12</a:t>
             </a:fld>
             <a:endParaRPr lang="zh-CN" altLang="en-US"/>
           </a:p>
@@ -3955,13 +4007,13 @@
   <p:clrMapOvr>
     <a:masterClrMapping/>
   </p:clrMapOvr>
-  <mc:AlternateContent xmlns:mc="http://schemas.openxmlformats.org/markup-compatibility/2006">
-    <mc:Choice xmlns:p159="http://schemas.microsoft.com/office/powerpoint/2015/09/main" Requires="p159">
+  <mc:AlternateContent xmlns:mc="http://schemas.openxmlformats.org/markup-compatibility/2006" xmlns:p159="http://schemas.microsoft.com/office/powerpoint/2015/09/main">
+    <mc:Choice Requires="p159">
       <p:transition spd="med">
         <p159:morph option="byObject"/>
       </p:transition>
     </mc:Choice>
-    <mc:Fallback>
+    <mc:Fallback xmlns="">
       <p:transition spd="med">
         <p:fade/>
       </p:transition>
@@ -4163,7 +4215,7 @@
           <a:p>
             <a:fld id="{4164A0BD-F726-4652-96CA-017D7FEF2292}" type="datetimeFigureOut">
               <a:rPr lang="zh-CN" altLang="en-US" smtClean="0"/>
-              <a:t>2023/10/19</a:t>
+              <a:t>2026/10/12</a:t>
             </a:fld>
             <a:endParaRPr lang="zh-CN" altLang="en-US"/>
           </a:p>
@@ -4272,13 +4324,13 @@
     <p:sldLayoutId id="2147483670" r:id="rId10"/>
     <p:sldLayoutId id="2147483671" r:id="rId11"/>
   </p:sldLayoutIdLst>
-  <mc:AlternateContent xmlns:mc="http://schemas.openxmlformats.org/markup-compatibility/2006">
-    <mc:Choice xmlns:p159="http://schemas.microsoft.com/office/powerpoint/2015/09/main" Requires="p159">
+  <mc:AlternateContent xmlns:mc="http://schemas.openxmlformats.org/markup-compatibility/2006" xmlns:p159="http://schemas.microsoft.com/office/powerpoint/2015/09/main">
+    <mc:Choice Requires="p159">
       <p:transition spd="med">
         <p159:morph option="byObject"/>
       </p:transition>
     </mc:Choice>
-    <mc:Fallback>
+    <mc:Fallback xmlns="">
       <p:transition spd="med">
         <p:fade/>
       </p:transition>
@@ -4749,13 +4801,13 @@
   <p:clrMapOvr>
     <a:masterClrMapping/>
   </p:clrMapOvr>
-  <mc:AlternateContent xmlns:mc="http://schemas.openxmlformats.org/markup-compatibility/2006">
-    <mc:Choice xmlns:p159="http://schemas.microsoft.com/office/powerpoint/2015/09/main" Requires="p159">
+  <mc:AlternateContent xmlns:mc="http://schemas.openxmlformats.org/markup-compatibility/2006" xmlns:p159="http://schemas.microsoft.com/office/powerpoint/2015/09/main">
+    <mc:Choice Requires="p159">
       <p:transition spd="med">
         <p159:morph option="byObject"/>
       </p:transition>
     </mc:Choice>
-    <mc:Fallback>
+    <mc:Fallback xmlns="">
       <p:transition spd="med">
         <p:fade/>
       </p:transition>
@@ -7415,13 +7467,13 @@
   <p:clrMapOvr>
     <a:masterClrMapping/>
   </p:clrMapOvr>
-  <mc:AlternateContent xmlns:mc="http://schemas.openxmlformats.org/markup-compatibility/2006">
-    <mc:Choice xmlns:p159="http://schemas.microsoft.com/office/powerpoint/2015/09/main" Requires="p159">
+  <mc:AlternateContent xmlns:mc="http://schemas.openxmlformats.org/markup-compatibility/2006" xmlns:p159="http://schemas.microsoft.com/office/powerpoint/2015/09/main">
+    <mc:Choice Requires="p159">
       <p:transition spd="med">
         <p159:morph option="byObject"/>
       </p:transition>
     </mc:Choice>
-    <mc:Fallback>
+    <mc:Fallback xmlns="">
       <p:transition spd="med">
         <p:fade/>
       </p:transition>
@@ -8050,13 +8102,13 @@
   <p:clrMapOvr>
     <a:masterClrMapping/>
   </p:clrMapOvr>
-  <mc:AlternateContent xmlns:mc="http://schemas.openxmlformats.org/markup-compatibility/2006">
-    <mc:Choice xmlns:p159="http://schemas.microsoft.com/office/powerpoint/2015/09/main" Requires="p159">
+  <mc:AlternateContent xmlns:mc="http://schemas.openxmlformats.org/markup-compatibility/2006" xmlns:p159="http://schemas.microsoft.com/office/powerpoint/2015/09/main">
+    <mc:Choice Requires="p159">
       <p:transition spd="med">
         <p159:morph option="byObject"/>
       </p:transition>
     </mc:Choice>
-    <mc:Fallback>
+    <mc:Fallback xmlns="">
       <p:transition spd="med">
         <p:fade/>
       </p:transition>

--- a/example/example.pptx
+++ b/example/example.pptx
@@ -199,7 +199,7 @@
           <a:p>
             <a:fld id="{02A9C2D5-8DF8-4FAE-95FA-381D99844E59}" type="datetimeFigureOut">
               <a:rPr lang="zh-CN" altLang="en-US" smtClean="0"/>
-              <a:t>2026/10/12</a:t>
+              <a:t>2026/10/14</a:t>
             </a:fld>
             <a:endParaRPr lang="zh-CN" altLang="en-US"/>
           </a:p>
@@ -1025,7 +1025,18 @@
                 <a:latin typeface="宋体" panose="02010600030101010101" pitchFamily="2" charset="-122"/>
                 <a:ea typeface="宋体" panose="02010600030101010101" pitchFamily="2" charset="-122"/>
               </a:rPr>
-              <a:t>支持检查更新●</a:t>
+              <a:t>支持检查</a:t>
+            </a:r>
+            <a:r>
+              <a:rPr lang="zh-CN" altLang="en-US">
+                <a:solidFill>
+                  <a:srgbClr val="BCBEC4"/>
+                </a:solidFill>
+                <a:effectLst/>
+                <a:latin typeface="宋体" panose="02010600030101010101" pitchFamily="2" charset="-122"/>
+                <a:ea typeface="宋体" panose="02010600030101010101" pitchFamily="2" charset="-122"/>
+              </a:rPr>
+              <a:t>更新●</a:t>
             </a:r>
             <a:endParaRPr lang="en-US" altLang="zh-CN" dirty="0">
               <a:solidFill>
@@ -1034,52 +1045,6 @@
               <a:effectLst/>
               <a:latin typeface="宋体" panose="02010600030101010101" pitchFamily="2" charset="-122"/>
               <a:ea typeface="宋体" panose="02010600030101010101" pitchFamily="2" charset="-122"/>
-            </a:endParaRPr>
-          </a:p>
-          <a:p>
-            <a:r>
-              <a:rPr lang="zh-CN" altLang="en-US" dirty="0">
-                <a:solidFill>
-                  <a:srgbClr val="BCBEC4"/>
-                </a:solidFill>
-                <a:effectLst/>
-              </a:rPr>
-              <a:t>更多</a:t>
-            </a:r>
-            <a:r>
-              <a:rPr lang="zh-CN" altLang="en-US">
-                <a:solidFill>
-                  <a:srgbClr val="BCBEC4"/>
-                </a:solidFill>
-                <a:effectLst/>
-              </a:rPr>
-              <a:t>更新功能，请</a:t>
-            </a:r>
-            <a:r>
-              <a:rPr lang="zh-CN" altLang="en-US" dirty="0">
-                <a:solidFill>
-                  <a:srgbClr val="BCBEC4"/>
-                </a:solidFill>
-                <a:effectLst/>
-              </a:rPr>
-              <a:t>查看项目主页。</a:t>
-            </a:r>
-            <a:r>
-              <a:rPr lang="zh-CN" altLang="en-US" dirty="0">
-                <a:solidFill>
-                  <a:srgbClr val="BCBEC4"/>
-                </a:solidFill>
-                <a:effectLst/>
-                <a:latin typeface="宋体" panose="02010600030101010101" pitchFamily="2" charset="-122"/>
-                <a:ea typeface="宋体" panose="02010600030101010101" pitchFamily="2" charset="-122"/>
-              </a:rPr>
-              <a:t>●</a:t>
-            </a:r>
-            <a:endParaRPr lang="zh-CN" altLang="en-US" dirty="0">
-              <a:solidFill>
-                <a:srgbClr val="BCBEC4"/>
-              </a:solidFill>
-              <a:effectLst/>
             </a:endParaRPr>
           </a:p>
         </p:txBody>
@@ -1398,7 +1363,7 @@
           <a:p>
             <a:fld id="{4164A0BD-F726-4652-96CA-017D7FEF2292}" type="datetimeFigureOut">
               <a:rPr lang="zh-CN" altLang="en-US" smtClean="0"/>
-              <a:t>2026/10/12</a:t>
+              <a:t>2026/10/14</a:t>
             </a:fld>
             <a:endParaRPr lang="zh-CN" altLang="en-US"/>
           </a:p>
@@ -1638,7 +1603,7 @@
           <a:p>
             <a:fld id="{4164A0BD-F726-4652-96CA-017D7FEF2292}" type="datetimeFigureOut">
               <a:rPr lang="zh-CN" altLang="en-US" smtClean="0"/>
-              <a:t>2026/10/12</a:t>
+              <a:t>2026/10/14</a:t>
             </a:fld>
             <a:endParaRPr lang="zh-CN" altLang="en-US"/>
           </a:p>
@@ -1830,7 +1795,7 @@
           <a:p>
             <a:fld id="{4164A0BD-F726-4652-96CA-017D7FEF2292}" type="datetimeFigureOut">
               <a:rPr lang="zh-CN" altLang="en-US" smtClean="0"/>
-              <a:t>2026/10/12</a:t>
+              <a:t>2026/10/14</a:t>
             </a:fld>
             <a:endParaRPr lang="zh-CN" altLang="en-US"/>
           </a:p>
@@ -2012,7 +1977,7 @@
           <a:p>
             <a:fld id="{4164A0BD-F726-4652-96CA-017D7FEF2292}" type="datetimeFigureOut">
               <a:rPr lang="zh-CN" altLang="en-US" smtClean="0"/>
-              <a:t>2026/10/12</a:t>
+              <a:t>2026/10/14</a:t>
             </a:fld>
             <a:endParaRPr lang="zh-CN" altLang="en-US"/>
           </a:p>
@@ -2278,7 +2243,7 @@
           <a:p>
             <a:fld id="{4164A0BD-F726-4652-96CA-017D7FEF2292}" type="datetimeFigureOut">
               <a:rPr lang="zh-CN" altLang="en-US" smtClean="0"/>
-              <a:t>2026/10/12</a:t>
+              <a:t>2026/10/14</a:t>
             </a:fld>
             <a:endParaRPr lang="zh-CN" altLang="en-US"/>
           </a:p>
@@ -2616,7 +2581,7 @@
           <a:p>
             <a:fld id="{4164A0BD-F726-4652-96CA-017D7FEF2292}" type="datetimeFigureOut">
               <a:rPr lang="zh-CN" altLang="en-US" smtClean="0"/>
-              <a:t>2026/10/12</a:t>
+              <a:t>2026/10/14</a:t>
             </a:fld>
             <a:endParaRPr lang="zh-CN" altLang="en-US"/>
           </a:p>
@@ -3079,7 +3044,7 @@
           <a:p>
             <a:fld id="{4164A0BD-F726-4652-96CA-017D7FEF2292}" type="datetimeFigureOut">
               <a:rPr lang="zh-CN" altLang="en-US" smtClean="0"/>
-              <a:t>2026/10/12</a:t>
+              <a:t>2026/10/14</a:t>
             </a:fld>
             <a:endParaRPr lang="zh-CN" altLang="en-US"/>
           </a:p>
@@ -3209,7 +3174,7 @@
           <a:p>
             <a:fld id="{4164A0BD-F726-4652-96CA-017D7FEF2292}" type="datetimeFigureOut">
               <a:rPr lang="zh-CN" altLang="en-US" smtClean="0"/>
-              <a:t>2026/10/12</a:t>
+              <a:t>2026/10/14</a:t>
             </a:fld>
             <a:endParaRPr lang="zh-CN" altLang="en-US"/>
           </a:p>
@@ -3316,7 +3281,7 @@
           <a:p>
             <a:fld id="{4164A0BD-F726-4652-96CA-017D7FEF2292}" type="datetimeFigureOut">
               <a:rPr lang="zh-CN" altLang="en-US" smtClean="0"/>
-              <a:t>2026/10/12</a:t>
+              <a:t>2026/10/14</a:t>
             </a:fld>
             <a:endParaRPr lang="zh-CN" altLang="en-US"/>
           </a:p>
@@ -3615,7 +3580,7 @@
           <a:p>
             <a:fld id="{4164A0BD-F726-4652-96CA-017D7FEF2292}" type="datetimeFigureOut">
               <a:rPr lang="zh-CN" altLang="en-US" smtClean="0"/>
-              <a:t>2026/10/12</a:t>
+              <a:t>2026/10/14</a:t>
             </a:fld>
             <a:endParaRPr lang="zh-CN" altLang="en-US"/>
           </a:p>
@@ -3949,7 +3914,7 @@
           <a:p>
             <a:fld id="{4164A0BD-F726-4652-96CA-017D7FEF2292}" type="datetimeFigureOut">
               <a:rPr lang="zh-CN" altLang="en-US" smtClean="0"/>
-              <a:t>2026/10/12</a:t>
+              <a:t>2026/10/14</a:t>
             </a:fld>
             <a:endParaRPr lang="zh-CN" altLang="en-US"/>
           </a:p>
@@ -4215,7 +4180,7 @@
           <a:p>
             <a:fld id="{4164A0BD-F726-4652-96CA-017D7FEF2292}" type="datetimeFigureOut">
               <a:rPr lang="zh-CN" altLang="en-US" smtClean="0"/>
-              <a:t>2026/10/12</a:t>
+              <a:t>2026/10/14</a:t>
             </a:fld>
             <a:endParaRPr lang="zh-CN" altLang="en-US"/>
           </a:p>
